--- a/week-03/presentations/ppts/day-04-prd-mini-capstone.pptx
+++ b/week-03/presentations/ppts/day-04-prd-mini-capstone.pptx
@@ -5291,16 +5291,7 @@
             </a:pPr>
             <a:r>
               <a:rPr/>
-              <a:t>Things that could go wrong. Each gets likelihood, impact, mitigation.</a:t>
-            </a:r>
-          </a:p>
-          <a:p>
-            <a:pPr lvl="0" indent="0" marL="0">
-              <a:buNone/>
-            </a:pPr>
-            <a:r>
-              <a:rPr/>
-              <a:t>“No risks” is a fail.</a:t>
+              <a:t>Things that could go wrong. Each gets likelihood, impact, mitigation. “No risks” is a fail.</a:t>
             </a:r>
           </a:p>
           <a:p>

--- a/week-03/presentations/ppts/day-04-prd-mini-capstone.pptx
+++ b/week-03/presentations/ppts/day-04-prd-mini-capstone.pptx
@@ -5388,6 +5388,47 @@
           </a:p>
         </p:txBody>
       </p:sp>
+      <p:sp>
+        <p:nvSpPr>
+          <p:cNvPr id="3" name="Content Placeholder 2"/>
+          <p:cNvSpPr>
+            <a:spLocks noGrp="1"/>
+          </p:cNvSpPr>
+          <p:nvPr>
+            <p:ph idx="1"/>
+          </p:nvPr>
+        </p:nvSpPr>
+        <p:spPr/>
+        <p:txBody>
+          <a:bodyPr/>
+          <a:lstStyle/>
+          <a:p>
+            <a:pPr lvl="0" indent="0">
+              <a:buNone/>
+            </a:pPr>
+            <a:r>
+              <a:rPr>
+                <a:latin typeface="Courier"/>
+              </a:rPr>
+              <a:t>### Risks
+| Risk | L | I | Mitigation |
+|------|---|---|------------|
+| Dispatchers refuse new flow because it's longer | M | H | Optional toggle in v1; observe adoption |
+| Audit-log volume blows our log budget | L | M | Tier-2 sample for non-error events |
+### Open questions
+- Will operations VP accept temporary read-only manager view in week 1?
+(Owner: Kim; needed by: 2026-05-12)
+- Can audit store handle 24-month retention at this volume?
+(Owner: Pat; needed by: 2026-05-19)
+### Assumptions
+- Median dispatcher device is mid-tier Android on 4G LTE
+(basis: device-fleet snapshot Q3; revisit if changes)
+- 30-day adoption signal sufficient to declare success
+(basis: prior reconcile rollout; revisit if behavior non-stationary)</a:t>
+            </a:r>
+          </a:p>
+        </p:txBody>
+      </p:sp>
     </p:spTree>
   </p:cSld>
 </p:sld>
@@ -7585,6 +7626,49 @@
             <a:r>
               <a:rPr/>
               <a:t>📝 Worked §8 (FieldPulse)</a:t>
+            </a:r>
+          </a:p>
+        </p:txBody>
+      </p:sp>
+      <p:sp>
+        <p:nvSpPr>
+          <p:cNvPr id="3" name="Content Placeholder 2"/>
+          <p:cNvSpPr>
+            <a:spLocks noGrp="1"/>
+          </p:cNvSpPr>
+          <p:nvPr>
+            <p:ph idx="1"/>
+          </p:nvPr>
+        </p:nvSpPr>
+        <p:spPr/>
+        <p:txBody>
+          <a:bodyPr/>
+          <a:lstStyle/>
+          <a:p>
+            <a:pPr lvl="0" indent="0">
+              <a:buNone/>
+            </a:pPr>
+            <a:r>
+              <a:rPr>
+                <a:latin typeface="Courier"/>
+              </a:rPr>
+              <a:t>## 8. Metrics &amp; validation
+### Primary metric
+&gt; Median reconcile-flow duration per dispatcher per shift
+&gt; Baseline: 45 min  |  Target: ≤ 12 min by day 30
+### Counter-metric
+&gt; % of dispatchers calling support after using the new flow
+&gt; If this rises by &gt; 3pp from baseline, we won the primary
+&gt; for the wrong reasons.
+### Secondary metrics
+- Reconcile-flow abandonment rate (declining)
+- Manual override entries per dispatcher (declining)
+- Mobile vs paper adoption ratio (mobile climbing)
+### Validation plan
+- Pre-launch: AC verification suite green
+- Launch + 7 days: primary directionally correct
+- Launch + 30 days: primary at or below 12 min
+- Launch + 90 days: counter-metric within +3pp band</a:t>
             </a:r>
           </a:p>
         </p:txBody>

--- a/week-03/presentations/ppts/day-04-prd-mini-capstone.pptx
+++ b/week-03/presentations/ppts/day-04-prd-mini-capstone.pptx
@@ -545,7 +545,7 @@
             </a:pPr>
             <a:r>
               <a:rPr/>
-              <a:t>Today the PRD ships. §§1–7 done; today adds §§8–11 plus the integration pass. AI restored Monday — today the discipline holds.</a:t>
+              <a:t>Today the PRD ships. Sections 1–7 done; today adds Sections 8–11 plus the integration pass. AI restored Monday — today the discipline holds.</a:t>
             </a:r>
           </a:p>
         </p:txBody>
@@ -791,7 +791,7 @@
             </a:pPr>
             <a:r>
               <a:rPr/>
-              <a:t>§10 names owners; §11 closes negotiation loops. Together they make the social network around the PRD visible — and prevent the “TBD owner” trap.</a:t>
+              <a:t>Section 10 names owners; Section 11 closes negotiation loops. Together they make the social network around the PRD visible — and prevent the “TBD owner” trap.</a:t>
             </a:r>
           </a:p>
         </p:txBody>
@@ -955,7 +955,7 @@
             </a:pPr>
             <a:r>
               <a:rPr/>
-              <a:t>Pull from §3 non-goals + §4 scope-out. If §11 is short, the PRD probably under-bounded.</a:t>
+              <a:t>Pull from Section 3 non-goals + Section 4 scope-out. If Section 11 is short, the PRD probably under-bounded.</a:t>
             </a:r>
           </a:p>
         </p:txBody>
@@ -1775,7 +1775,7 @@
             </a:pPr>
             <a:r>
               <a:rPr/>
-              <a:t>§8 ties the PRD back to the Tier Sheet from Week 2. Without it, the PRD is a feature spec disconnected from the strategy it serves.</a:t>
+              <a:t>Section 8 ties the PRD back to the Tier Sheet from Week 2. Without it, the PRD is a feature spec disconnected from the strategy it serves.</a:t>
             </a:r>
           </a:p>
         </p:txBody>
@@ -5383,7 +5383,7 @@
             </a:pPr>
             <a:r>
               <a:rPr/>
-              <a:t>📝 Worked §9 (excerpt)</a:t>
+              <a:t>📝 Worked Section 9 (excerpt)</a:t>
             </a:r>
           </a:p>
         </p:txBody>
@@ -5471,7 +5471,7 @@
             </a:pPr>
             <a:r>
               <a:rPr/>
-              <a:t>👥 Activity 2 — §9 Risks, Questions, Assumptions</a:t>
+              <a:t>👥 Activity 2 — Section 9 Risks, Questions, Assumptions</a:t>
             </a:r>
           </a:p>
         </p:txBody>
@@ -5600,7 +5600,7 @@
             </a:pPr>
             <a:r>
               <a:rPr/>
-              <a:t>Block 3 — §§10 + 11 Dependencies + Out-of-Scope</a:t>
+              <a:t>Block 3 — Sections 10 + 11 Dependencies + Out-of-Scope</a:t>
             </a:r>
           </a:p>
         </p:txBody>
@@ -5675,7 +5675,7 @@
             </a:pPr>
             <a:r>
               <a:rPr/>
-              <a:t>🔗 §10 Dependencies</a:t>
+              <a:t>🔗 Section 10 Dependencies</a:t>
             </a:r>
           </a:p>
         </p:txBody>
@@ -5978,7 +5978,7 @@
             </a:pPr>
             <a:r>
               <a:rPr/>
-              <a:t>🚫 §11 Out-of-Scope Follow-ups</a:t>
+              <a:t>🚫 Section 11 Out-of-Scope Follow-ups</a:t>
             </a:r>
           </a:p>
         </p:txBody>
@@ -6048,7 +6048,7 @@
             </a:pPr>
             <a:r>
               <a:rPr/>
-              <a:t>Why this matters: §11 is the negotiation tool for Week 6. “I see what you might also want; here’s where it lives in the backlog.”</a:t>
+              <a:t>Why this matters: Section 11 is the negotiation tool for Week 6. “I see what you might also want; here’s where it lives in the backlog.”</a:t>
             </a:r>
           </a:p>
         </p:txBody>
@@ -6095,7 +6095,7 @@
             </a:pPr>
             <a:r>
               <a:rPr/>
-              <a:t>👥 Activity 3 — §§10 + 11</a:t>
+              <a:t>👥 Activity 3 — Sections 10 + 11</a:t>
             </a:r>
           </a:p>
         </p:txBody>
@@ -6333,7 +6333,7 @@
             </a:pPr>
             <a:r>
               <a:rPr/>
-              <a:t>§1 → §2 flow</a:t>
+              <a:t>Section 1 → Section 2 flow</a:t>
             </a:r>
           </a:p>
           <a:p>
@@ -6351,7 +6351,7 @@
             </a:pPr>
             <a:r>
               <a:rPr/>
-              <a:t>§3 goals tied to §8 metrics</a:t>
+              <a:t>Section 3 goals tied to Section 8 metrics</a:t>
             </a:r>
           </a:p>
           <a:p>
@@ -6369,7 +6369,7 @@
             </a:pPr>
             <a:r>
               <a:rPr/>
-              <a:t>§5 sketch ↔ §6 AC</a:t>
+              <a:t>Section 5 sketch ↔ Section 6 AC</a:t>
             </a:r>
           </a:p>
           <a:p>
@@ -6387,7 +6387,7 @@
             </a:pPr>
             <a:r>
               <a:rPr/>
-              <a:t>§6 AC vs §7 NFRs</a:t>
+              <a:t>Section 6 AC vs Section 7 NFRs</a:t>
             </a:r>
           </a:p>
           <a:p>
@@ -6405,7 +6405,7 @@
             </a:pPr>
             <a:r>
               <a:rPr/>
-              <a:t>§7 NFRs ↔ §8 observability</a:t>
+              <a:t>Section 7 NFRs ↔ Section 8 observability</a:t>
             </a:r>
           </a:p>
           <a:p>
@@ -6423,7 +6423,7 @@
             </a:pPr>
             <a:r>
               <a:rPr/>
-              <a:t>§4 scope-out → §11 follow-ups</a:t>
+              <a:t>Section 4 scope-out → Section 11 follow-ups</a:t>
             </a:r>
           </a:p>
           <a:p>
@@ -6441,7 +6441,7 @@
             </a:pPr>
             <a:r>
               <a:rPr/>
-              <a:t>§9 risks named, owned, mitigated</a:t>
+              <a:t>Section 9 risks named, owned, mitigated</a:t>
             </a:r>
           </a:p>
           <a:p>
@@ -6888,7 +6888,7 @@
             </a:pPr>
             <a:r>
               <a:rPr/>
-              <a:t>§§1–11 complete PRD</a:t>
+              <a:t>Sections 1–11 complete PRD</a:t>
             </a:r>
           </a:p>
           <a:p>
@@ -7125,34 +7125,34 @@
             </a:pPr>
             <a:r>
               <a:rPr/>
-              <a:t>Write §8 Metrics &amp; Validation tied to your Tier Sheet and NS</a:t>
-            </a:r>
-          </a:p>
-          <a:p>
-            <a:pPr lvl="0" indent="0" marL="0">
-              <a:buNone/>
-            </a:pPr>
-            <a:r>
-              <a:rPr/>
-              <a:t>Write §9 Risks &amp; Open Questions — “no risks” is a fail</a:t>
-            </a:r>
-          </a:p>
-          <a:p>
-            <a:pPr lvl="0" indent="0" marL="0">
-              <a:buNone/>
-            </a:pPr>
-            <a:r>
-              <a:rPr/>
-              <a:t>Write §10 Dependencies with named owners</a:t>
-            </a:r>
-          </a:p>
-          <a:p>
-            <a:pPr lvl="0" indent="0" marL="0">
-              <a:buNone/>
-            </a:pPr>
-            <a:r>
-              <a:rPr/>
-              <a:t>Write §11 Out-of-Scope Follow-ups — the negotiation tool</a:t>
+              <a:t>Write Section 8 Metrics &amp; Validation tied to your Tier Sheet and NS</a:t>
+            </a:r>
+          </a:p>
+          <a:p>
+            <a:pPr lvl="0" indent="0" marL="0">
+              <a:buNone/>
+            </a:pPr>
+            <a:r>
+              <a:rPr/>
+              <a:t>Write Section 9 Risks &amp; Open Questions — “no risks” is a fail</a:t>
+            </a:r>
+          </a:p>
+          <a:p>
+            <a:pPr lvl="0" indent="0" marL="0">
+              <a:buNone/>
+            </a:pPr>
+            <a:r>
+              <a:rPr/>
+              <a:t>Write Section 10 Dependencies with named owners</a:t>
+            </a:r>
+          </a:p>
+          <a:p>
+            <a:pPr lvl="0" indent="0" marL="0">
+              <a:buNone/>
+            </a:pPr>
+            <a:r>
+              <a:rPr/>
+              <a:t>Write Section 11 Out-of-Scope Follow-ups — the negotiation tool</a:t>
             </a:r>
           </a:p>
           <a:p>
@@ -7305,7 +7305,7 @@
             </a:pPr>
             <a:r>
               <a:rPr/>
-              <a:t>§8 Metrics &amp; Validation</a:t>
+              <a:t>Section 8 Metrics &amp; Validation</a:t>
             </a:r>
           </a:p>
           <a:p>
@@ -7332,7 +7332,7 @@
             </a:pPr>
             <a:r>
               <a:rPr/>
-              <a:t>§9 Risks, Questions, Assumptions</a:t>
+              <a:t>Section 9 Risks, Questions, Assumptions</a:t>
             </a:r>
           </a:p>
           <a:p>
@@ -7359,7 +7359,7 @@
             </a:pPr>
             <a:r>
               <a:rPr/>
-              <a:t>§§10 + 11 Dependencies + Out-of-scope</a:t>
+              <a:t>Sections 10 + 11 Dependencies + Out-of-scope</a:t>
             </a:r>
           </a:p>
           <a:p>
@@ -7433,7 +7433,7 @@
             </a:pPr>
             <a:r>
               <a:rPr/>
-              <a:t>Block 1 — §8 Metrics &amp; Validation</a:t>
+              <a:t>Block 1 — Section 8 Metrics &amp; Validation</a:t>
             </a:r>
           </a:p>
         </p:txBody>
@@ -7508,7 +7508,7 @@
             </a:pPr>
             <a:r>
               <a:rPr/>
-              <a:t>📊 §8 Anatomy</a:t>
+              <a:t>📊 Section 8 Anatomy</a:t>
             </a:r>
           </a:p>
         </p:txBody>
@@ -7625,7 +7625,7 @@
             </a:pPr>
             <a:r>
               <a:rPr/>
-              <a:t>📝 Worked §8 (FieldPulse)</a:t>
+              <a:t>📝 Worked Section 8 (FieldPulse)</a:t>
             </a:r>
           </a:p>
         </p:txBody>
@@ -7715,7 +7715,7 @@
             </a:pPr>
             <a:r>
               <a:rPr/>
-              <a:t>👥 Activity 1 — §8 Metrics &amp; Validation</a:t>
+              <a:t>👥 Activity 1 — Section 8 Metrics &amp; Validation</a:t>
             </a:r>
           </a:p>
         </p:txBody>
@@ -7835,7 +7835,7 @@
             </a:pPr>
             <a:r>
               <a:rPr/>
-              <a:t>Block 2 — §9 Risks, Questions, Assumptions</a:t>
+              <a:t>Block 2 — Section 9 Risks, Questions, Assumptions</a:t>
             </a:r>
           </a:p>
         </p:txBody>

--- a/week-03/presentations/ppts/day-04-prd-mini-capstone.pptx
+++ b/week-03/presentations/ppts/day-04-prd-mini-capstone.pptx
@@ -5931,7 +5931,7 @@
             </a:pPr>
             <a:r>
               <a:rPr/>
-              <a:t>Owner is a person, not a team. “The auth team” is unowned; “Lin from auth” is owned.</a:t>
+              <a:t>Owner is a person, not a team. On the single sign-on (SSO) scope dependency, “the auth team” is unowned; “Lin from auth” is owned.</a:t>
             </a:r>
           </a:p>
         </p:txBody>
@@ -6003,7 +6003,7 @@
             </a:pPr>
             <a:r>
               <a:rPr/>
-              <a:t>What this PRD acknowledges but won’t ship in this iteration:</a:t>
+              <a:t>What this Product Requirements Document (PRD) acknowledges but won’t ship in this iteration:</a:t>
             </a:r>
           </a:p>
           <a:p>
@@ -6315,6 +6315,15 @@
             </a:pPr>
             <a:r>
               <a:rPr/>
+              <a:t>Read the PRD top to bottom: do the acceptance criteria (AC) and non-functional requirements (NFR) still cohere?</a:t>
+            </a:r>
+          </a:p>
+          <a:p>
+            <a:pPr lvl="0" indent="0" marL="0">
+              <a:buNone/>
+            </a:pPr>
+            <a:r>
+              <a:rPr/>
               <a:t>Check</a:t>
             </a:r>
           </a:p>
@@ -7125,7 +7134,7 @@
             </a:pPr>
             <a:r>
               <a:rPr/>
-              <a:t>Write Section 8 Metrics &amp; Validation tied to your Tier Sheet and NS</a:t>
+              <a:t>Write Section 8 Metrics &amp; Validation tied to your Tier Sheet and North Star (NS)</a:t>
             </a:r>
           </a:p>
           <a:p>

--- a/week-03/presentations/ppts/day-04-prd-mini-capstone.pptx
+++ b/week-03/presentations/ppts/day-04-prd-mini-capstone.pptx
@@ -709,7 +709,7 @@
             </a:pPr>
             <a:r>
               <a:rPr/>
-              <a:t>“No risks” is a hard fail. If a triad insists they have none, ask: “What scenario would make us regret this?”</a:t>
+              <a:t>“No risks” is a hard fail. If a quad insists they have none, ask: “What scenario would make us regret this?”</a:t>
             </a:r>
           </a:p>
         </p:txBody>
@@ -1201,7 +1201,7 @@
             </a:pPr>
             <a:r>
               <a:rPr/>
-              <a:t>This is the same checklist Friday’s reviewers will use. Triads who run it themselves catch their own issues.</a:t>
+              <a:t>This is the same checklist Friday’s reviewers will use. Quads who run it themselves catch their own issues.</a:t>
             </a:r>
           </a:p>
         </p:txBody>
@@ -1283,7 +1283,7 @@
             </a:pPr>
             <a:r>
               <a:rPr/>
-              <a:t>Even without AI use, generic prose creeps in when triads tire. The detector catches both.</a:t>
+              <a:t>Even without AI use, generic prose creeps in when quads tire. The detector catches both.</a:t>
             </a:r>
           </a:p>
         </p:txBody>
@@ -1365,7 +1365,7 @@
             </a:pPr>
             <a:r>
               <a:rPr/>
-              <a:t>Wrap-share: each triad names the section they’re proudest of and the section they’re least sure about. Reviewers will hammer the latter.</a:t>
+              <a:t>Wrap-share: each quad names the section they’re proudest of and the section they’re least sure about. Reviewers will hammer the latter.</a:t>
             </a:r>
           </a:p>
         </p:txBody>
@@ -1857,7 +1857,7 @@
             </a:pPr>
             <a:r>
               <a:rPr/>
-              <a:t>If a triad’s primary metric is “we’ll watch a few things” — push to one number.</a:t>
+              <a:t>If a quad’s primary metric is “we’ll watch a few things” — push to one number.</a:t>
             </a:r>
           </a:p>
         </p:txBody>
@@ -2021,7 +2021,7 @@
             </a:pPr>
             <a:r>
               <a:rPr/>
-              <a:t>Common stumble: triads pick a different metric than their NS Defense Card. Push them to reconcile.</a:t>
+              <a:t>Common stumble: quads pick a different metric than their NS Defense Card. Push them to reconcile.</a:t>
             </a:r>
           </a:p>
         </p:txBody>
@@ -5499,7 +5499,7 @@
             </a:pPr>
             <a:r>
               <a:rPr b="1"/>
-              <a:t>Triads • 40 minutes</a:t>
+              <a:t>Quads • 40 minutes</a:t>
             </a:r>
           </a:p>
           <a:p>
@@ -6123,7 +6123,7 @@
             </a:pPr>
             <a:r>
               <a:rPr b="1"/>
-              <a:t>Triads • 40 minutes</a:t>
+              <a:t>Quads • 40 minutes</a:t>
             </a:r>
           </a:p>
           <a:p>
@@ -6477,7 +6477,7 @@
             </a:pPr>
             <a:r>
               <a:rPr/>
-              <a:t>Voice is consistent triad voice</a:t>
+              <a:t>Voice is consistent quad voice</a:t>
             </a:r>
           </a:p>
         </p:txBody>
@@ -6762,7 +6762,7 @@
             </a:pPr>
             <a:r>
               <a:rPr b="1"/>
-              <a:t>Triads • 45 minutes • Wrap</a:t>
+              <a:t>Quads • 45 minutes • Wrap</a:t>
             </a:r>
           </a:p>
           <a:p>
@@ -7752,7 +7752,7 @@
             </a:pPr>
             <a:r>
               <a:rPr b="1"/>
-              <a:t>Triads • 35 minutes</a:t>
+              <a:t>Quads • 35 minutes</a:t>
             </a:r>
           </a:p>
           <a:p>

--- a/week-03/presentations/ppts/day-04-prd-mini-capstone.pptx
+++ b/week-03/presentations/ppts/day-04-prd-mini-capstone.pptx
@@ -5499,7 +5499,7 @@
             </a:pPr>
             <a:r>
               <a:rPr b="1"/>
-              <a:t>Quads • 40 minutes</a:t>
+              <a:t>Quads • 50 minutes</a:t>
             </a:r>
           </a:p>
           <a:p>
@@ -6123,7 +6123,7 @@
             </a:pPr>
             <a:r>
               <a:rPr b="1"/>
-              <a:t>Quads • 40 minutes</a:t>
+              <a:t>Quads • 50 minutes</a:t>
             </a:r>
           </a:p>
           <a:p>
@@ -6762,7 +6762,7 @@
             </a:pPr>
             <a:r>
               <a:rPr b="1"/>
-              <a:t>Quads • 45 minutes • Wrap</a:t>
+              <a:t>Quads • 55 minutes • Wrap</a:t>
             </a:r>
           </a:p>
           <a:p>
@@ -7752,7 +7752,7 @@
             </a:pPr>
             <a:r>
               <a:rPr b="1"/>
-              <a:t>Quads • 35 minutes</a:t>
+              <a:t>Quads • 45 minutes</a:t>
             </a:r>
           </a:p>
           <a:p>

--- a/week-03/presentations/ppts/day-04-prd-mini-capstone.pptx
+++ b/week-03/presentations/ppts/day-04-prd-mini-capstone.pptx
@@ -5517,7 +5517,7 @@
             </a:pPr>
             <a:r>
               <a:rPr/>
-              <a:t>15 min: risks brainstorm + mitigations</a:t>
+              <a:t>25 min: risks brainstorm + mitigations</a:t>
             </a:r>
           </a:p>
           <a:p>
@@ -5553,7 +5553,7 @@
             </a:pPr>
             <a:r>
               <a:rPr/>
-              <a:t>⏱ 15 + 10 + 10 + 5</a:t>
+              <a:t>⏱ 25 + 10 + 10 + 5</a:t>
             </a:r>
           </a:p>
         </p:txBody>
@@ -6141,7 +6141,7 @@
             </a:pPr>
             <a:r>
               <a:rPr/>
-              <a:t>20 min: dependencies (owner / what / when / status)</a:t>
+              <a:t>30 min: dependencies (owner / what / when / status)</a:t>
             </a:r>
           </a:p>
           <a:p>
@@ -6168,7 +6168,7 @@
             </a:pPr>
             <a:r>
               <a:rPr/>
-              <a:t>⏱ 20 + 15 + 5</a:t>
+              <a:t>⏱ 30 + 15 + 5</a:t>
             </a:r>
           </a:p>
         </p:txBody>
@@ -6780,7 +6780,7 @@
             </a:pPr>
             <a:r>
               <a:rPr/>
-              <a:t>15 min: solo read-through with margin notes</a:t>
+              <a:t>25 min: solo read-through with margin notes</a:t>
             </a:r>
           </a:p>
           <a:p>
@@ -6816,7 +6816,7 @@
             </a:pPr>
             <a:r>
               <a:rPr/>
-              <a:t>⏱ 15 + 10 + 15 + 5 · 15-min wrap-share</a:t>
+              <a:t>⏱ 25 + 10 + 15 + 5 · 15-min wrap-share</a:t>
             </a:r>
           </a:p>
         </p:txBody>
@@ -7779,7 +7779,7 @@
             </a:pPr>
             <a:r>
               <a:rPr/>
-              <a:t>15 min: set targets, write defenses</a:t>
+              <a:t>25 min: set targets, write defenses</a:t>
             </a:r>
           </a:p>
           <a:p>
@@ -7797,7 +7797,7 @@
             </a:pPr>
             <a:r>
               <a:rPr/>
-              <a:t>⏱ 10 + 15 + 10</a:t>
+              <a:t>⏱ 10 + 25 + 10</a:t>
             </a:r>
           </a:p>
         </p:txBody>
